--- a/Hackathon_Submission_Files/Member_3_Project_Presentation.pptx
+++ b/Hackathon_Submission_Files/Member_3_Project_Presentation.pptx
@@ -261,7 +261,7 @@
       <p15:sldGuideLst xmlns:p15="http://schemas.microsoft.com/office/powerpoint/2012/main"/>
     </p:ext>
     <p:ext uri="GoogleSlidesCustomDataVersion2">
-      <go:slidesCustomData xmlns:go="http://customooxmlschemas.google.com/" xmlns:ahyp="http://schemas.microsoft.com/office/drawing/2018/hyperlinkcolor" xmlns:p15="http://schemas.microsoft.com/office/powerpoint/2012/main" xmlns:p14="http://schemas.microsoft.com/office/powerpoint/2010/main" xmlns:com="http://schemas.openxmlformats.org/drawingml/2006/compatibility" xmlns:pvml="urn:schemas-microsoft-com:office:powerpoint" xmlns:v="urn:schemas-microsoft-com:vml" xmlns:o="urn:schemas-microsoft-com:office:office" xmlns:dgm="http://schemas.openxmlformats.org/drawingml/2006/diagram" xmlns:c="http://schemas.openxmlformats.org/drawingml/2006/chart" xmlns:mv="urn:schemas-microsoft-com:mac:vml" xmlns:mc="http://schemas.openxmlformats.org/markup-compatibility/2006" xmlns="" r:id="rId27" roundtripDataSignature="AMtx7mjt3491jQ7aCoyIz2WXeHKroE7tpQ=="/>
+      <go:slidesCustomData xmlns="" xmlns:mc="http://schemas.openxmlformats.org/markup-compatibility/2006" xmlns:mv="urn:schemas-microsoft-com:mac:vml" xmlns:c="http://schemas.openxmlformats.org/drawingml/2006/chart" xmlns:dgm="http://schemas.openxmlformats.org/drawingml/2006/diagram" xmlns:o="urn:schemas-microsoft-com:office:office" xmlns:v="urn:schemas-microsoft-com:vml" xmlns:pvml="urn:schemas-microsoft-com:office:powerpoint" xmlns:com="http://schemas.openxmlformats.org/drawingml/2006/compatibility" xmlns:p14="http://schemas.microsoft.com/office/powerpoint/2010/main" xmlns:p15="http://schemas.microsoft.com/office/powerpoint/2012/main" xmlns:ahyp="http://schemas.microsoft.com/office/drawing/2018/hyperlinkcolor" xmlns:go="http://customooxmlschemas.google.com/" r:id="rId27" roundtripDataSignature="AMtx7mjt3491jQ7aCoyIz2WXeHKroE7tpQ=="/>
     </p:ext>
   </p:extLst>
 </p:presentation>
@@ -11813,17 +11813,13 @@
           <a:p>
             <a:pPr algn="ctr"/>
             <a:r>
-              <a:rPr lang="en-US" sz="6600" b="1" dirty="0"/>
+              <a:rPr lang="en-US" sz="6600" b="1"/>
               <a:t>IBM University Engagement Project Submission</a:t>
             </a:r>
-            <a:r>
-              <a:rPr lang="en-US" b="1" dirty="0"/>
-              <a:t/>
-            </a:r>
             <a:br>
-              <a:rPr lang="en-US" b="1" dirty="0"/>
+              <a:rPr lang="en-US" b="1"/>
             </a:br>
-            <a:endParaRPr lang="en-IN" dirty="0"/>
+            <a:endParaRPr lang="en-IN"/>
           </a:p>
         </p:txBody>
       </p:sp>
@@ -12310,7 +12306,7 @@
         </p:blipFill>
         <p:spPr>
           <a:xfrm>
-            <a:off x="170222" y="2714946"/>
+            <a:off x="170222" y="2677622"/>
             <a:ext cx="5541024" cy="2643098"/>
           </a:xfrm>
           <a:prstGeom prst="rect">
@@ -13601,28 +13597,28 @@
       </p:sp>
       <p:pic>
         <p:nvPicPr>
-          <p:cNvPr id="2" name="Picture 1"/>
+          <p:cNvPr id="3" name="Picture 2">
+            <a:extLst>
+              <a:ext uri="{FF2B5EF4-FFF2-40B4-BE49-F238E27FC236}">
+                <a16:creationId xmlns:a16="http://schemas.microsoft.com/office/drawing/2014/main" id="{E13A78F8-9861-3F0C-511D-39599473539E}"/>
+              </a:ext>
+            </a:extLst>
+          </p:cNvPr>
           <p:cNvPicPr>
             <a:picLocks noChangeAspect="1"/>
           </p:cNvPicPr>
           <p:nvPr/>
         </p:nvPicPr>
         <p:blipFill>
-          <a:blip r:embed="rId2">
-            <a:extLst>
-              <a:ext uri="{28A0092B-C50C-407E-A947-70E740481C1C}">
-                <a14:useLocalDpi xmlns:a14="http://schemas.microsoft.com/office/drawing/2010/main" val="0"/>
-              </a:ext>
-            </a:extLst>
-          </a:blip>
+          <a:blip r:embed="rId2"/>
           <a:stretch>
             <a:fillRect/>
           </a:stretch>
         </p:blipFill>
         <p:spPr>
           <a:xfrm>
-            <a:off x="1513185" y="756409"/>
-            <a:ext cx="9446140" cy="5868325"/>
+            <a:off x="2733055" y="796413"/>
+            <a:ext cx="5958661" cy="5555900"/>
           </a:xfrm>
           <a:prstGeom prst="rect">
             <a:avLst/>
@@ -13720,28 +13716,28 @@
       </p:sp>
       <p:pic>
         <p:nvPicPr>
-          <p:cNvPr id="2" name="Picture 1"/>
+          <p:cNvPr id="4" name="Picture 3">
+            <a:extLst>
+              <a:ext uri="{FF2B5EF4-FFF2-40B4-BE49-F238E27FC236}">
+                <a16:creationId xmlns:a16="http://schemas.microsoft.com/office/drawing/2014/main" id="{12DD85D9-DBBF-7A8F-E825-8D0C825F6635}"/>
+              </a:ext>
+            </a:extLst>
+          </p:cNvPr>
           <p:cNvPicPr>
             <a:picLocks noChangeAspect="1"/>
           </p:cNvPicPr>
           <p:nvPr/>
         </p:nvPicPr>
         <p:blipFill>
-          <a:blip r:embed="rId2">
-            <a:extLst>
-              <a:ext uri="{28A0092B-C50C-407E-A947-70E740481C1C}">
-                <a14:useLocalDpi xmlns:a14="http://schemas.microsoft.com/office/drawing/2010/main" val="0"/>
-              </a:ext>
-            </a:extLst>
-          </a:blip>
+          <a:blip r:embed="rId2"/>
           <a:stretch>
             <a:fillRect/>
           </a:stretch>
         </p:blipFill>
         <p:spPr>
           <a:xfrm>
-            <a:off x="1476045" y="726851"/>
-            <a:ext cx="9593301" cy="6047173"/>
+            <a:off x="1697638" y="903499"/>
+            <a:ext cx="8796724" cy="5249658"/>
           </a:xfrm>
           <a:prstGeom prst="rect">
             <a:avLst/>
@@ -13947,7 +13943,7 @@
           <p:nvPr>
             <p:extLst>
               <p:ext uri="{D42A27DB-BD31-4B8C-83A1-F6EECF244321}">
-                <p14:modId xmlns:p14="http://schemas.microsoft.com/office/powerpoint/2010/main" val="14864048"/>
+                <p14:modId xmlns:p14="http://schemas.microsoft.com/office/powerpoint/2010/main" val="1251558002"/>
               </p:ext>
             </p:extLst>
           </p:nvPr>
@@ -14353,39 +14349,8 @@
                         <a:buNone/>
                       </a:pPr>
                       <a:r>
-                        <a:rPr lang="en-IN" sz="2000" dirty="0" smtClean="0"/>
-                        <a:t>  </a:t>
-                      </a:r>
-                      <a:r>
-                        <a:rPr lang="en-IN" sz="2000" dirty="0" err="1" smtClean="0"/>
-                        <a:t>Badgujar</a:t>
-                      </a:r>
-                      <a:r>
-                        <a:rPr lang="en-IN" sz="2000" baseline="0" dirty="0" smtClean="0"/>
-                        <a:t> </a:t>
-                      </a:r>
-                      <a:r>
-                        <a:rPr lang="en-IN" sz="2000" baseline="0" dirty="0" err="1" smtClean="0"/>
-                        <a:t>Yash</a:t>
-                      </a:r>
-                      <a:r>
-                        <a:rPr lang="en-IN" sz="2000" baseline="0" dirty="0" smtClean="0"/>
-                        <a:t> </a:t>
-                      </a:r>
-                    </a:p>
-                    <a:p>
-                      <a:pPr marL="0" marR="0" lvl="0" indent="0" algn="ctr" rtl="0">
-                        <a:spcBef>
-                          <a:spcPts val="0"/>
-                        </a:spcBef>
-                        <a:spcAft>
-                          <a:spcPts val="0"/>
-                        </a:spcAft>
-                        <a:buNone/>
-                      </a:pPr>
-                      <a:r>
-                        <a:rPr lang="en-IN" sz="2000" baseline="0" dirty="0" err="1" smtClean="0"/>
-                        <a:t>Rameshbhai</a:t>
+                        <a:rPr lang="en-US" sz="2000" dirty="0"/>
+                        <a:t>Tanvi Chib</a:t>
                       </a:r>
                       <a:endParaRPr sz="2000" dirty="0"/>
                     </a:p>
@@ -14506,8 +14471,8 @@
                         <a:buNone/>
                       </a:pPr>
                       <a:r>
-                        <a:rPr lang="en-IN" sz="2000" dirty="0" smtClean="0"/>
-                        <a:t>yashbadgujar1533@gmail.com</a:t>
+                        <a:rPr lang="en-US" sz="2000" dirty="0"/>
+                        <a:t>tanvichib24@gmail.com</a:t>
                       </a:r>
                       <a:endParaRPr sz="2000" dirty="0"/>
                     </a:p>
@@ -14568,21 +14533,9 @@
                         </a:spcAft>
                         <a:buNone/>
                       </a:pPr>
-                      <a:endParaRPr lang="en-IN" sz="2000" dirty="0" smtClean="0"/>
-                    </a:p>
-                    <a:p>
-                      <a:pPr marL="0" marR="0" lvl="0" indent="0" algn="ctr" rtl="0">
-                        <a:spcBef>
-                          <a:spcPts val="0"/>
-                        </a:spcBef>
-                        <a:spcAft>
-                          <a:spcPts val="0"/>
-                        </a:spcAft>
-                        <a:buNone/>
-                      </a:pPr>
                       <a:r>
-                        <a:rPr lang="en-IN" sz="2000" dirty="0" smtClean="0"/>
-                        <a:t>9313417120</a:t>
+                        <a:rPr lang="en-IN" sz="2000" dirty="0"/>
+                        <a:t>9797620455</a:t>
                       </a:r>
                       <a:endParaRPr sz="2000" dirty="0"/>
                     </a:p>
@@ -14744,28 +14697,28 @@
       </p:sp>
       <p:pic>
         <p:nvPicPr>
-          <p:cNvPr id="2" name="Picture 1"/>
+          <p:cNvPr id="8" name="Picture 7">
+            <a:extLst>
+              <a:ext uri="{FF2B5EF4-FFF2-40B4-BE49-F238E27FC236}">
+                <a16:creationId xmlns:a16="http://schemas.microsoft.com/office/drawing/2014/main" id="{84BAF7AD-CA3E-5BCC-7FEC-24DF0D138F2D}"/>
+              </a:ext>
+            </a:extLst>
+          </p:cNvPr>
           <p:cNvPicPr>
             <a:picLocks noChangeAspect="1"/>
           </p:cNvPicPr>
           <p:nvPr/>
         </p:nvPicPr>
         <p:blipFill>
-          <a:blip r:embed="rId3">
-            <a:extLst>
-              <a:ext uri="{28A0092B-C50C-407E-A947-70E740481C1C}">
-                <a14:useLocalDpi xmlns:a14="http://schemas.microsoft.com/office/drawing/2010/main" val="0"/>
-              </a:ext>
-            </a:extLst>
-          </a:blip>
+          <a:blip r:embed="rId3"/>
           <a:stretch>
             <a:fillRect/>
           </a:stretch>
         </p:blipFill>
         <p:spPr>
           <a:xfrm>
-            <a:off x="4079606" y="3580057"/>
-            <a:ext cx="902942" cy="1187386"/>
+            <a:off x="4109883" y="3608831"/>
+            <a:ext cx="884905" cy="1158612"/>
           </a:xfrm>
           <a:prstGeom prst="rect">
             <a:avLst/>
@@ -15167,160 +15120,152 @@
           <a:lstStyle/>
           <a:p>
             <a:pPr fontAlgn="base"/>
-            <a:endParaRPr lang="en-US" b="1" dirty="0"/>
-          </a:p>
-          <a:p>
-            <a:r>
-              <a:rPr lang="en-US" b="1" dirty="0"/>
+            <a:endParaRPr lang="en-US" b="1"/>
+          </a:p>
+          <a:p>
+            <a:r>
+              <a:rPr lang="en-US" b="1"/>
               <a:t>Proposed Solution: Smart Heritage Conservation Platform</a:t>
             </a:r>
           </a:p>
           <a:p>
             <a:r>
-              <a:rPr lang="en-US" dirty="0"/>
+              <a:rPr lang="en-US"/>
               <a:t>The proposed solution is a </a:t>
             </a:r>
             <a:r>
-              <a:rPr lang="en-US" b="1" dirty="0"/>
+              <a:rPr lang="en-US" b="1"/>
               <a:t>multi-agent Agentic AI platform for heritage conservation and visitor experience</a:t>
             </a:r>
             <a:r>
-              <a:rPr lang="en-US" dirty="0"/>
+              <a:rPr lang="en-US"/>
               <a:t> built using </a:t>
             </a:r>
             <a:r>
-              <a:rPr lang="en-US" b="1" dirty="0" err="1"/>
+              <a:rPr lang="en-US" b="1" err="1"/>
               <a:t>LangFlow</a:t>
             </a:r>
             <a:r>
-              <a:rPr lang="en-US" b="1" dirty="0"/>
+              <a:rPr lang="en-US" b="1"/>
               <a:t>, IBM Bob, IBM Granite LLM, and IBM Cloud</a:t>
             </a:r>
             <a:r>
-              <a:rPr lang="en-US" dirty="0"/>
-              <a:t> to protect Ahmedabad's Walled City and the </a:t>
-            </a:r>
-            <a:r>
-              <a:rPr lang="en-US" dirty="0" err="1"/>
-              <a:t>Modhera</a:t>
-            </a:r>
-            <a:r>
-              <a:rPr lang="en-US" dirty="0"/>
-              <a:t> Sun Temple while enriching the visitor experience through an intelligent, modular architecture.</a:t>
-            </a:r>
-          </a:p>
-          <a:p>
-            <a:r>
-              <a:rPr lang="en-US" dirty="0"/>
+              <a:rPr lang="en-US"/>
+              <a:t> to protect Ahmedabad's Walled City and the Modhera Sun Temple while enriching the visitor experience through an intelligent, modular architecture.</a:t>
+            </a:r>
+          </a:p>
+          <a:p>
+            <a:r>
+              <a:rPr lang="en-US"/>
               <a:t>At its core, the solution uses a </a:t>
             </a:r>
             <a:r>
-              <a:rPr lang="en-US" b="1" dirty="0"/>
+              <a:rPr lang="en-US" b="1"/>
               <a:t>Retrieval-Augmented Generation (RAG)</a:t>
             </a:r>
             <a:r>
-              <a:rPr lang="en-US" dirty="0"/>
+              <a:rPr lang="en-US"/>
               <a:t> pipeline to fetch verified heritage, conservation, and historical data from trusted sources such as ASI records, Gujarat Tourism archives, and site survey reports. This data is embedded and stored in a vector database, enabling the system to retrieve and summarize structural health readings, footfall statistics, and cultural context using IBM Granite models.</a:t>
             </a:r>
           </a:p>
           <a:p>
             <a:r>
-              <a:rPr lang="en-US" dirty="0"/>
+              <a:rPr lang="en-US"/>
               <a:t>The system consists of five key agents:</a:t>
             </a:r>
           </a:p>
           <a:p>
             <a:r>
-              <a:rPr lang="en-US" b="1" dirty="0"/>
+              <a:rPr lang="en-US" b="1"/>
               <a:t>Structural Health Monitoring Agent</a:t>
             </a:r>
             <a:r>
-              <a:rPr lang="en-US" dirty="0"/>
+              <a:rPr lang="en-US"/>
               <a:t> continuously analyzes sensor and imagery data to detect early signs of structural stress, cracks, or weathering. </a:t>
             </a:r>
           </a:p>
           <a:p>
             <a:r>
-              <a:rPr lang="en-US" b="1" dirty="0"/>
+              <a:rPr lang="en-US" b="1"/>
               <a:t>Visitor Flow Management Agent</a:t>
             </a:r>
             <a:r>
-              <a:rPr lang="en-US" dirty="0"/>
+              <a:rPr lang="en-US"/>
               <a:t> tracks real-time footfall and crowd density to recommend optimal visiting routes and prevent overcrowding. </a:t>
             </a:r>
           </a:p>
           <a:p>
             <a:r>
-              <a:rPr lang="en-US" b="1" dirty="0"/>
+              <a:rPr lang="en-US" b="1"/>
               <a:t>Personalized Heritage Storytelling Agent</a:t>
             </a:r>
             <a:r>
-              <a:rPr lang="en-US" dirty="0"/>
+              <a:rPr lang="en-US"/>
               <a:t> delivers immersive, multilingual narratives and cultural context tailored to each visitor's interests. </a:t>
             </a:r>
           </a:p>
           <a:p>
             <a:r>
-              <a:rPr lang="en-US" b="1" dirty="0"/>
+              <a:rPr lang="en-US" b="1"/>
               <a:t>Encroachment Detection Agent</a:t>
             </a:r>
             <a:r>
-              <a:rPr lang="en-US" dirty="0"/>
+              <a:rPr lang="en-US"/>
               <a:t> analyzes satellite and drone imagery to flag unauthorized construction near protected heritage zones. </a:t>
             </a:r>
           </a:p>
           <a:p>
             <a:r>
-              <a:rPr lang="en-US" dirty="0"/>
+              <a:rPr lang="en-US"/>
               <a:t>The solution also includes a </a:t>
             </a:r>
             <a:r>
-              <a:rPr lang="en-US" b="1" dirty="0"/>
+              <a:rPr lang="en-US" b="1"/>
               <a:t>Conservation Reporting Dashboard Agent</a:t>
             </a:r>
             <a:r>
-              <a:rPr lang="en-US" dirty="0"/>
+              <a:rPr lang="en-US"/>
               <a:t> (built with </a:t>
             </a:r>
             <a:r>
-              <a:rPr lang="en-US" dirty="0" err="1"/>
-              <a:t>Streamlit</a:t>
-            </a:r>
-            <a:r>
-              <a:rPr lang="en-US" dirty="0"/>
-              <a:t> or React) that consolidates structural health alerts, visitor flow trends, and encroachment reports for conservation authorities and site managers.</a:t>
-            </a:r>
-          </a:p>
-          <a:p>
-            <a:r>
-              <a:rPr lang="en-US" dirty="0" err="1"/>
+              <a:rPr lang="en-US" err="1"/>
+              <a:t>Streamlit or React</a:t>
+            </a:r>
+            <a:r>
+              <a:rPr lang="en-US"/>
+              <a:t>) that consolidates structural health alerts, visitor flow trends, and encroachment reports for conservation authorities and site managers.</a:t>
+            </a:r>
+          </a:p>
+          <a:p>
+            <a:r>
+              <a:rPr lang="en-US" err="1"/>
               <a:t>LangFlow</a:t>
             </a:r>
             <a:r>
-              <a:rPr lang="en-US" dirty="0"/>
+              <a:rPr lang="en-US"/>
               <a:t> is used to orchestrate agent workflows, IBM Bob supports development and testing, IBM Cloud ensures scalable and secure deployment, and IBM Granite LLM powers reasoning, summarization, and personalization across all agents.</a:t>
             </a:r>
           </a:p>
           <a:p>
             <a:r>
-              <a:rPr lang="en-US" dirty="0"/>
+              <a:rPr lang="en-US"/>
               <a:t>Overall, this solution delivers an </a:t>
             </a:r>
             <a:r>
-              <a:rPr lang="en-US" b="1" dirty="0"/>
+              <a:rPr lang="en-US" b="1"/>
               <a:t>end-to-end intelligent heritage conservation and visitor engagement platform</a:t>
             </a:r>
             <a:r>
-              <a:rPr lang="en-US" dirty="0"/>
+              <a:rPr lang="en-US"/>
               <a:t> that safeguards Gujarat's UNESCO sites while creating richer, safer, and more personalized experiences for every visitor.</a:t>
             </a:r>
           </a:p>
           <a:p>
             <a:pPr fontAlgn="base"/>
-            <a:endParaRPr lang="en-US" dirty="0"/>
-          </a:p>
-          <a:p>
-            <a:endParaRPr lang="en-IN" dirty="0"/>
+            <a:endParaRPr lang="en-US"/>
+          </a:p>
+          <a:p>
+            <a:endParaRPr lang="en-IN"/>
           </a:p>
         </p:txBody>
       </p:sp>
@@ -15353,10 +15298,10 @@
           <a:lstStyle/>
           <a:p>
             <a:r>
-              <a:rPr lang="en-US" sz="2400" b="1" dirty="0"/>
+              <a:rPr lang="en-US" sz="2400" b="1"/>
               <a:t>Proposed Solution -</a:t>
             </a:r>
-            <a:endParaRPr lang="en-IN" sz="2400" b="1" dirty="0"/>
+            <a:endParaRPr lang="en-IN" sz="2400" b="1"/>
           </a:p>
         </p:txBody>
       </p:sp>
@@ -16138,75 +16083,75 @@
           </a:bodyPr>
           <a:lstStyle/>
           <a:p>
-            <a:endParaRPr lang="en-US" dirty="0"/>
-          </a:p>
-          <a:p>
-            <a:r>
-              <a:rPr lang="en-US" b="1" dirty="0"/>
+            <a:endParaRPr lang="en-US"/>
+          </a:p>
+          <a:p>
+            <a:r>
+              <a:rPr lang="en-US" b="1"/>
               <a:t>1) Chat Input </a:t>
             </a:r>
             <a:r>
-              <a:rPr lang="en-US" dirty="0"/>
+              <a:rPr lang="en-US"/>
               <a:t>– Interface where visitors or conservation staff enter queries, structural reports, or storytelling requests (text/voice/image).</a:t>
             </a:r>
           </a:p>
           <a:p>
-            <a:endParaRPr lang="en-US" dirty="0"/>
-          </a:p>
-          <a:p>
-            <a:r>
-              <a:rPr lang="en-US" b="1" dirty="0"/>
+            <a:endParaRPr lang="en-US"/>
+          </a:p>
+          <a:p>
+            <a:r>
+              <a:rPr lang="en-US" b="1"/>
               <a:t>2) IBM </a:t>
             </a:r>
             <a:r>
-              <a:rPr lang="en-US" b="1" dirty="0" err="1"/>
+              <a:rPr lang="en-US" b="1" err="1"/>
               <a:t>watsonx</a:t>
             </a:r>
             <a:r>
-              <a:rPr lang="en-US" b="1" dirty="0"/>
+              <a:rPr lang="en-US" b="1"/>
               <a:t> AI Agent </a:t>
             </a:r>
             <a:r>
-              <a:rPr lang="en-US" dirty="0"/>
+              <a:rPr lang="en-US"/>
               <a:t>- Processes input using Granite models to generate structural health insights, visitor flow recommendations, or personalized heritage narratives. </a:t>
             </a:r>
           </a:p>
           <a:p>
-            <a:endParaRPr lang="en-US" dirty="0"/>
-          </a:p>
-          <a:p>
-            <a:r>
-              <a:rPr lang="en-US" b="1" dirty="0"/>
+            <a:endParaRPr lang="en-US"/>
+          </a:p>
+          <a:p>
+            <a:r>
+              <a:rPr lang="en-US" b="1"/>
               <a:t>3) Name of IBM Granite model - </a:t>
             </a:r>
             <a:r>
-              <a:rPr lang="en-US" dirty="0"/>
+              <a:rPr lang="en-US"/>
               <a:t>Granite-4.0-8B-Instruct → Efficient for real-time structural alerts and storytelling generation</a:t>
             </a:r>
           </a:p>
           <a:p>
-            <a:endParaRPr lang="en-US" dirty="0"/>
-          </a:p>
-          <a:p>
-            <a:r>
-              <a:rPr lang="en-US" b="1" dirty="0"/>
+            <a:endParaRPr lang="en-US"/>
+          </a:p>
+          <a:p>
+            <a:r>
+              <a:rPr lang="en-US" b="1"/>
               <a:t>4) Chat output -</a:t>
             </a:r>
             <a:r>
-              <a:rPr lang="en-US" dirty="0"/>
+              <a:rPr lang="en-US"/>
               <a:t>Displays AI-generated responses such as structural health alerts, visitor flow recommendations, and heritage stories. </a:t>
             </a:r>
           </a:p>
           <a:p>
-            <a:endParaRPr lang="en-US" dirty="0"/>
-          </a:p>
-          <a:p>
-            <a:r>
-              <a:rPr lang="en-US" b="1" dirty="0"/>
+            <a:endParaRPr lang="en-US"/>
+          </a:p>
+          <a:p>
+            <a:r>
+              <a:rPr lang="en-US" b="1"/>
               <a:t>5) </a:t>
             </a:r>
             <a:r>
-              <a:rPr lang="en-US" b="1" dirty="0">
+              <a:rPr lang="en-US" b="1">
                 <a:highlight>
                   <a:srgbClr val="FFFF00"/>
                 </a:highlight>
@@ -16214,7 +16159,7 @@
               <a:t>File component - </a:t>
             </a:r>
             <a:r>
-              <a:rPr lang="en-US" dirty="0">
+              <a:rPr lang="en-US">
                 <a:highlight>
                   <a:srgbClr val="FFFF00"/>
                 </a:highlight>
@@ -16223,71 +16168,55 @@
             </a:r>
           </a:p>
           <a:p>
-            <a:endParaRPr lang="en-US" dirty="0"/>
-          </a:p>
-          <a:p>
-            <a:endParaRPr lang="en-US" dirty="0"/>
-          </a:p>
-          <a:p>
-            <a:r>
-              <a:rPr lang="en-US" dirty="0"/>
+            <a:endParaRPr lang="en-US"/>
+          </a:p>
+          <a:p>
+            <a:endParaRPr lang="en-US"/>
+          </a:p>
+          <a:p>
+            <a:r>
+              <a:rPr lang="en-US"/>
               <a:t>6) </a:t>
             </a:r>
             <a:r>
-              <a:rPr lang="en-US" dirty="0">
+              <a:rPr lang="en-US">
                 <a:highlight>
                   <a:srgbClr val="FFFF00"/>
                 </a:highlight>
               </a:rPr>
-              <a:t>Vector Store component - Stores </a:t>
-            </a:r>
-            <a:r>
-              <a:rPr lang="en-US" dirty="0" err="1">
-                <a:highlight>
-                  <a:srgbClr val="FFFF00"/>
-                </a:highlight>
-              </a:rPr>
-              <a:t>embeddings</a:t>
-            </a:r>
-            <a:r>
-              <a:rPr lang="en-US" dirty="0">
-                <a:highlight>
-                  <a:srgbClr val="FFFF00"/>
-                </a:highlight>
-              </a:rPr>
-              <a:t> of heritage records and conservation reports for RAG-based retrieval.</a:t>
+              <a:t>Vector Store component - Stores embeddings of heritage records and conservation reports for RAG-based retrieval.</a:t>
             </a:r>
           </a:p>
           <a:p>
             <a:pPr marL="342900" indent="-342900">
               <a:buAutoNum type="arabicParenR" startAt="3"/>
             </a:pPr>
-            <a:endParaRPr lang="en-US" dirty="0"/>
-          </a:p>
-          <a:p>
-            <a:endParaRPr lang="en-US" dirty="0"/>
-          </a:p>
-          <a:p>
-            <a:endParaRPr lang="en-US" dirty="0"/>
-          </a:p>
-          <a:p>
-            <a:endParaRPr lang="en-US" dirty="0"/>
-          </a:p>
-          <a:p>
-            <a:endParaRPr lang="en-US" dirty="0"/>
-          </a:p>
-          <a:p>
-            <a:endParaRPr lang="en-US" dirty="0"/>
-          </a:p>
-          <a:p>
-            <a:endParaRPr lang="en-US" dirty="0"/>
-          </a:p>
-          <a:p>
-            <a:r>
-              <a:rPr lang="en-US" dirty="0"/>
+            <a:endParaRPr lang="en-US"/>
+          </a:p>
+          <a:p>
+            <a:endParaRPr lang="en-US"/>
+          </a:p>
+          <a:p>
+            <a:endParaRPr lang="en-US"/>
+          </a:p>
+          <a:p>
+            <a:endParaRPr lang="en-US"/>
+          </a:p>
+          <a:p>
+            <a:endParaRPr lang="en-US"/>
+          </a:p>
+          <a:p>
+            <a:endParaRPr lang="en-US"/>
+          </a:p>
+          <a:p>
+            <a:endParaRPr lang="en-US"/>
+          </a:p>
+          <a:p>
+            <a:r>
+              <a:rPr lang="en-US"/>
               <a:t> </a:t>
             </a:r>
-            <a:endParaRPr lang="en-IN" dirty="0"/>
+            <a:endParaRPr lang="en-IN"/>
           </a:p>
         </p:txBody>
       </p:sp>
